--- a/PPTs/Lecture_xx_Review.pptx
+++ b/PPTs/Lecture_xx_Review.pptx
@@ -2023,7 +2023,7 @@
             </a:r>
             <a:r>
               <a:rPr lang="en-US" sz="1200" dirty="0"/>
-              <a:t> (carry) – set (1) when an add-based operation produces an overflow, when a subtract-based operation doesn’t require a borrow; when shifting, holds the last bit that’s been shifted out; otherwise cleared (0).</a:t>
+              <a:t xml:space="preserve"> (carry) – set (1) when an add-based operation produces a carry out, when a subtract-based operation doesn’t require a borrow; when shifting, holds the last bit that’s been shifted out; otherwise cleared (0).</a:t>
             </a:r>
           </a:p>
           <a:p>
@@ -7581,7 +7581,7 @@
           <a:p>
             <a:r>
               <a:rPr lang="en-US"/>
-              <a:t>Fall 2025</a:t>
+              <a:t>Fall 2026</a:t>
             </a:r>
             <a:endParaRPr lang="en-US" dirty="0"/>
           </a:p>
@@ -7969,7 +7969,7 @@
             <a:pPr lvl="1"/>
             <a:r>
               <a:rPr lang="en-US" sz="1200" dirty="0"/>
-              <a:t>Non-arithmetic operations does not touch V bit, such as </a:t>
+              <a:t xml:space="preserve">Non-arithmetic operations do not touch the V bit, such as </a:t>
             </a:r>
             <a:r>
               <a:rPr lang="en-US" sz="1200" dirty="0">
@@ -12079,7 +12079,7 @@
                 <a:latin typeface="Consolas" panose="020B0609020204030204" pitchFamily="49" charset="0"/>
                 <a:cs typeface="Consolas" panose="020B0609020204030204" pitchFamily="49" charset="0"/>
               </a:rPr>
-              <a:t> main(void{</a:t>
+              <a:t xml:space="preserve"> main(void){</a:t>
             </a:r>
           </a:p>
           <a:p>
@@ -13704,7 +13704,7 @@
           <a:p>
             <a:r>
               <a:rPr lang="en-US" sz="1350" dirty="0"/>
-              <a:t>The subroutine can take arguments larger than 32 bits. For example, a double-word variable, such as 64-bit long, is passed in two consecutive registers (e.g. R0 and R1, or R2 and R3). A 128-bit variable is passed in four consecutive registers. </a:t>
+              <a:t>The subroutine can take arguments larger than 32 bits. For example, a double-word variable, such as 64-bit long long, is passed in two consecutive registers (e.g. R0 and R1, or R2 and R3). A 128-bit variable is passed in four consecutive registers. </a:t>
             </a:r>
           </a:p>
           <a:p>
@@ -15857,7 +15857,7 @@
                           <a:latin typeface="Consolas" panose="020B0609020204030204" pitchFamily="49" charset="0"/>
                           <a:cs typeface="Consolas" panose="020B0609020204030204" pitchFamily="49" charset="0"/>
                         </a:rPr>
-                        <a:t>EDP</a:t>
+                        <a:t>ENDP</a:t>
                       </a:r>
                       <a:endParaRPr kumimoji="0" lang="en-US" sz="1200" kern="1200" dirty="0">
                         <a:solidFill>
@@ -16022,7 +16022,7 @@
                           <a:latin typeface="Consolas" panose="020B0609020204030204" pitchFamily="49" charset="0"/>
                           <a:cs typeface="Consolas" panose="020B0609020204030204" pitchFamily="49" charset="0"/>
                         </a:rPr>
-                        <a:t>EDP</a:t>
+                        <a:t>ENDP</a:t>
                       </a:r>
                       <a:endParaRPr lang="en-US" sz="1200" dirty="0">
                         <a:effectLst/>
@@ -17254,7 +17254,7 @@
                   <a:srgbClr val="FF0000"/>
                 </a:solidFill>
               </a:rPr>
-              <a:t> must save and store it if </a:t>
+              <a:t xml:space="preserve"> must save and restore it if </a:t>
             </a:r>
             <a:r>
               <a:rPr lang="en-US" sz="1350" dirty="0" err="1">
@@ -17270,7 +17270,7 @@
                   <a:srgbClr val="FF0000"/>
                 </a:solidFill>
               </a:rPr>
-              <a:t> modifies it</a:t>
+              <a:t xml:space="preserve"> modifies it</a:t>
             </a:r>
           </a:p>
         </p:txBody>
@@ -17877,7 +17877,7 @@
             <a:pPr lvl="1"/>
             <a:r>
               <a:rPr lang="en-US" dirty="0"/>
-              <a:t>Each 8-, 16- or 32-bit variables is passed via </a:t>
+              <a:t xml:space="preserve">Each 8-, 16- or 32-bit variable is passed via </a:t>
             </a:r>
             <a:r>
               <a:rPr lang="en-US" dirty="0">
@@ -17888,7 +17888,7 @@
             </a:r>
             <a:r>
               <a:rPr lang="en-US" dirty="0"/>
-              <a:t>, </a:t>
+              <a:t xml:space="preserve">, </a:t>
             </a:r>
             <a:r>
               <a:rPr lang="en-US" dirty="0">
@@ -17899,7 +17899,7 @@
             </a:r>
             <a:r>
               <a:rPr lang="en-US" dirty="0"/>
-              <a:t>, </a:t>
+              <a:t xml:space="preserve">, </a:t>
             </a:r>
             <a:r>
               <a:rPr lang="en-US" dirty="0">
@@ -17910,7 +17910,7 @@
             </a:r>
             <a:r>
               <a:rPr lang="en-US" dirty="0"/>
-              <a:t>, </a:t>
+              <a:t xml:space="preserve">, </a:t>
             </a:r>
             <a:r>
               <a:rPr lang="en-US" dirty="0">
@@ -19124,7 +19124,7 @@
                 <a:latin typeface="Arial" charset="0"/>
                 <a:cs typeface="Arial" charset="0"/>
               </a:rPr>
-              <a:t>CL_PSC</a:t>
+              <a:t>CK_PSC</a:t>
             </a:r>
             <a:endParaRPr lang="en-US" sz="1800" b="1" i="1" baseline="-25000" dirty="0">
               <a:solidFill>
@@ -21371,7 +21371,7 @@
                                 <a:rPr lang="en-US" sz="2400" i="1">
                                   <a:latin typeface="Cambria Math"/>
                                 </a:rPr>
-                                <m:t>𝐶𝐿</m:t>
+                                <m:t>𝐶𝐾</m:t>
                               </m:r>
                               <m:r>
                                 <a:rPr lang="en-US" sz="2400" i="1">
@@ -21640,7 +21640,7 @@
                 <a:latin typeface="Arial" charset="0"/>
                 <a:cs typeface="Arial" charset="0"/>
               </a:rPr>
-              <a:t>CL_CNT</a:t>
+              <a:t>CK_CNT</a:t>
             </a:r>
             <a:endParaRPr lang="en-US" sz="1800" b="1" i="1" baseline="-25000" dirty="0">
               <a:solidFill>
@@ -22204,7 +22204,7 @@
                 <a:pPr lvl="0"/>
                 <a:r>
                   <a:rPr lang="en-US" dirty="0"/>
-                  <a:t>Timer clock frequency </a:t>
+                  <a:t xml:space="preserve">Timer clock frequency </a:t>
                 </a:r>
                 <a14:m>
                   <m:oMath xmlns:m="http://schemas.openxmlformats.org/officeDocument/2006/math">
@@ -22264,7 +22264,7 @@
                 </a14:m>
                 <a:r>
                   <a:rPr lang="en-US" dirty="0"/>
-                  <a:t> vs. CPU Clock Frequency </a:t>
+                  <a:t xml:space="preserve"> vs. CPU Clock Frequency </a:t>
                 </a:r>
                 <a14:m>
                   <m:oMath xmlns:m="http://schemas.openxmlformats.org/officeDocument/2006/math">
@@ -22306,7 +22306,7 @@
                 </a14:m>
                 <a:r>
                   <a:rPr lang="en-US" dirty="0"/>
-                  <a:t> (</a:t>
+                  <a:t xml:space="preserve"> (</a:t>
                 </a:r>
                 <a14:m>
                   <m:oMath xmlns:m="http://schemas.openxmlformats.org/officeDocument/2006/math">
@@ -22331,7 +22331,7 @@
                           <a:rPr lang="en-US" sz="2800" i="1">
                             <a:latin typeface="Cambria Math"/>
                           </a:rPr>
-                          <m:t>𝐶𝐿</m:t>
+                          <m:t>𝐶𝐾</m:t>
                         </m:r>
                         <m:r>
                           <a:rPr lang="en-US" sz="2800" i="1">
@@ -32752,7 +32752,7 @@
             <a:pPr lvl="2"/>
             <a:r>
               <a:rPr lang="en-US" dirty="0"/>
-              <a:t>ADD r1, r0, r0, LSL 2</a:t>
+              <a:t>ADD r1, r0, r0, LSL #2</a:t>
             </a:r>
           </a:p>
           <a:p>
@@ -32800,7 +32800,7 @@
             <a:pPr lvl="1"/>
             <a:r>
               <a:rPr lang="en-US" dirty="0"/>
-              <a:t>Conditional Execution: MOVEQ, MOVNE</a:t>
+              <a:t>Conditional Execution: MOVEQ, MOVNE (needs an IT block on Cortex-M, e.g. ITE EQ)</a:t>
             </a:r>
           </a:p>
           <a:p>
@@ -33079,7 +33079,7 @@
                   <a:rPr lang="en-US" dirty="0">
                     <a:latin typeface="Gill Sans Light"/>
                   </a:rPr>
-                  <a:t>ASR (arithmetic shift right): </a:t>
+                  <a:t xml:space="preserve">ASR (arithmetic shift right): </a:t>
                 </a:r>
                 <a:r>
                   <a:rPr lang="en-US" dirty="0">
@@ -33088,13 +33088,13 @@
                     </a:solidFill>
                     <a:latin typeface="Gill Sans Light"/>
                   </a:rPr>
-                  <a:t>shifts right, fills the sign bit on the left </a:t>
+                  <a:t xml:space="preserve">shifts right, fills the sign bit on the left </a:t>
                 </a:r>
                 <a:r>
                   <a:rPr lang="en-US" dirty="0">
                     <a:latin typeface="Gill Sans Light"/>
                   </a:rPr>
-                  <a:t>to preserving the sign; C gets the last bit shifted out of bit 0. This is signed division by </a:t>
+                  <a:t xml:space="preserve">to preserve the sign; C gets the last bit shifted out of bit 0. This is signed division by </a:t>
                 </a:r>
                 <a14:m>
                   <m:oMath xmlns:m="http://schemas.openxmlformats.org/officeDocument/2006/math">
@@ -33129,7 +33129,7 @@
                   <a:rPr lang="ar-AE" dirty="0">
                     <a:latin typeface="Gill Sans Light"/>
                   </a:rPr>
-                  <a:t> </a:t>
+                  <a:t xml:space="preserve"> </a:t>
                 </a:r>
                 <a:r>
                   <a:rPr lang="en-US" dirty="0">
